--- a/dynatrace-techtouch-demo/slides/Dynatrace_デモのご説明.pptx
+++ b/dynatrace-techtouch-demo/slides/Dynatrace_デモのご説明.pptx
@@ -1111,7 +1111,7 @@
       </p:sp>
       <p:sp>
         <p:nvSpPr>
-          <p:cNvPr id="25" name="Slide Number Placeholder 0"/>
+          <p:cNvPr id="5" name="Slide Number Placeholder 0"/>
           <p:cNvSpPr>
             <a:spLocks noGrp="1"/>
           </p:cNvSpPr>
@@ -1181,7 +1181,7 @@
       </p:grpSpPr>
       <p:sp>
         <p:nvSpPr>
-          <p:cNvPr id="25" name="Slide Number Placeholder 0"/>
+          <p:cNvPr id="2" name="Slide Number Placeholder 0"/>
           <p:cNvSpPr>
             <a:spLocks noGrp="1"/>
           </p:cNvSpPr>
@@ -3409,7 +3409,7 @@
       </p:sp>
       <p:sp>
         <p:nvSpPr>
-          <p:cNvPr id="25" name="Slide Number Placeholder 0"/>
+          <p:cNvPr id="56" name="Slide Number Placeholder 0"/>
           <p:cNvSpPr>
             <a:spLocks noGrp="1"/>
           </p:cNvSpPr>
@@ -4784,7 +4784,7 @@
       </p:sp>
       <p:sp>
         <p:nvSpPr>
-          <p:cNvPr id="25" name="Slide Number Placeholder 0"/>
+          <p:cNvPr id="45" name="Slide Number Placeholder 0"/>
           <p:cNvSpPr>
             <a:spLocks noGrp="1"/>
           </p:cNvSpPr>
@@ -6096,7 +6096,7 @@
       </p:sp>
       <p:sp>
         <p:nvSpPr>
-          <p:cNvPr id="25" name="Slide Number Placeholder 0"/>
+          <p:cNvPr id="42" name="Slide Number Placeholder 0"/>
           <p:cNvSpPr>
             <a:spLocks noGrp="1"/>
           </p:cNvSpPr>

--- a/dynatrace-techtouch-demo/slides/Dynatrace_デモのご説明.pptx
+++ b/dynatrace-techtouch-demo/slides/Dynatrace_デモのご説明.pptx
@@ -2810,7 +2810,7 @@
                   <a:schemeClr val="tx1"/>
                 </a:solidFill>
               </a:rPr>
-              <a:t>ひな型からダッシュボードを作り、共有</a:t>
+              <a:t>共有されたひな型を複製して作り、共有</a:t>
             </a:r>
             <a:endParaRPr lang="en-US" sz="1200" dirty="0"/>
           </a:p>
@@ -3329,7 +3329,7 @@
                   <a:schemeClr val="tx1"/>
                 </a:solidFill>
               </a:rPr>
-              <a:t>確認済みのひな型から作る。AI Hubが変える理由を説明し、専門家の承認後に保存・共有する</a:t>
+              <a:t>専門家が共有したひな型を、ガイドに沿って複製して作る。AI Hubが変える理由を説明し、承認後に共有する</a:t>
             </a:r>
             <a:endParaRPr lang="en-US" sz="1300" dirty="0"/>
           </a:p>
@@ -4174,7 +4174,7 @@
                   <a:schemeClr val="tx1"/>
                 </a:solidFill>
               </a:rPr>
-              <a:t>ガイド8ステップ。ひな型からダッシュボードを作り、専門家の確認を受けて運用チームに共有する</a:t>
+              <a:t>ガイド8ステップ。共有されたひな型を複製して作り、専門家の確認を受けて運用チームに共有する</a:t>
             </a:r>
             <a:endParaRPr lang="en-US" sz="1300" dirty="0"/>
           </a:p>
@@ -5416,7 +5416,7 @@
                   <a:schemeClr val="tx1"/>
                 </a:solidFill>
               </a:rPr>
-              <a:t>案内は構想の表現です。御社の手順に合わせて作ります</a:t>
+              <a:t>「ひな型から作る」流れもガイドの案です。御社の手順で作ります</a:t>
             </a:r>
             <a:endParaRPr lang="en-US" sz="1200" dirty="0"/>
           </a:p>

--- a/dynatrace-techtouch-demo/slides/Dynatrace_デモのご説明.pptx
+++ b/dynatrace-techtouch-demo/slides/Dynatrace_デモのご説明.pptx
@@ -1723,7 +1723,7 @@
                   <a:schemeClr val="tx1"/>
                 </a:solidFill>
               </a:rPr>
-              <a:t>デモ動画は3章＋振り返り（3分35秒）</a:t>
+              <a:t>デモ動画は3章＋振り返り（3分34秒）</a:t>
             </a:r>
             <a:endParaRPr lang="en-US" sz="1500" dirty="0"/>
           </a:p>
